--- a/e2e/fixtures/template-editing.pptx
+++ b/e2e/fixtures/template-editing.pptx
@@ -44,6 +44,206 @@
           <a:chExt cx="0" cy="0"/>
         </a:xfrm>
       </p:grpSpPr>
+    </p:spTree>
+  </p:cSld>
+  <p:clrMapOvr>
+    <a:masterClrMapping/>
+  </p:clrMapOvr>
+</p:sldLayout>
+</file>
+
+<file path=ppt/slideLayouts/slideLayout10.xml><?xml version="1.0" encoding="utf-8"?>
+<p:sldLayout xmlns:a="http://schemas.openxmlformats.org/drawingml/2006/main" xmlns:r="http://schemas.openxmlformats.org/officeDocument/2006/relationships" xmlns:p="http://schemas.openxmlformats.org/presentationml/2006/main" type="vertTx" preserve="1">
+  <p:cSld name="Title and Vertical Text">
+    <p:spTree>
+      <p:nvGrpSpPr>
+        <p:cNvPr id="1" name=""/>
+        <p:cNvGrpSpPr/>
+        <p:nvPr/>
+      </p:nvGrpSpPr>
+      <p:grpSpPr>
+        <a:xfrm>
+          <a:off x="0" y="0"/>
+          <a:ext cx="0" cy="0"/>
+          <a:chOff x="0" y="0"/>
+          <a:chExt cx="0" cy="0"/>
+        </a:xfrm>
+      </p:grpSpPr>
+    </p:spTree>
+  </p:cSld>
+  <p:clrMapOvr>
+    <a:masterClrMapping/>
+  </p:clrMapOvr>
+</p:sldLayout>
+</file>
+
+<file path=ppt/slideLayouts/slideLayout11.xml><?xml version="1.0" encoding="utf-8"?>
+<p:sldLayout xmlns:a="http://schemas.openxmlformats.org/drawingml/2006/main" xmlns:r="http://schemas.openxmlformats.org/officeDocument/2006/relationships" xmlns:p="http://schemas.openxmlformats.org/presentationml/2006/main" type="vertTitleAndTx" preserve="1">
+  <p:cSld name="Vertical Title and Text">
+    <p:spTree>
+      <p:nvGrpSpPr>
+        <p:cNvPr id="1" name=""/>
+        <p:cNvGrpSpPr/>
+        <p:nvPr/>
+      </p:nvGrpSpPr>
+      <p:grpSpPr>
+        <a:xfrm>
+          <a:off x="0" y="0"/>
+          <a:ext cx="0" cy="0"/>
+          <a:chOff x="0" y="0"/>
+          <a:chExt cx="0" cy="0"/>
+        </a:xfrm>
+      </p:grpSpPr>
+    </p:spTree>
+  </p:cSld>
+  <p:clrMapOvr>
+    <a:masterClrMapping/>
+  </p:clrMapOvr>
+</p:sldLayout>
+</file>
+
+<file path=ppt/slideLayouts/slideLayout2.xml><?xml version="1.0" encoding="utf-8"?>
+<p:sldLayout xmlns:a="http://schemas.openxmlformats.org/drawingml/2006/main" xmlns:r="http://schemas.openxmlformats.org/officeDocument/2006/relationships" xmlns:p="http://schemas.openxmlformats.org/presentationml/2006/main" type="obj" preserve="1">
+  <p:cSld name="Title and Content">
+    <p:spTree>
+      <p:nvGrpSpPr>
+        <p:cNvPr id="1" name=""/>
+        <p:cNvGrpSpPr/>
+        <p:nvPr/>
+      </p:nvGrpSpPr>
+      <p:grpSpPr>
+        <a:xfrm>
+          <a:off x="0" y="0"/>
+          <a:ext cx="0" cy="0"/>
+          <a:chOff x="0" y="0"/>
+          <a:chExt cx="0" cy="0"/>
+        </a:xfrm>
+      </p:grpSpPr>
+    </p:spTree>
+  </p:cSld>
+  <p:clrMapOvr>
+    <a:masterClrMapping/>
+  </p:clrMapOvr>
+</p:sldLayout>
+</file>
+
+<file path=ppt/slideLayouts/slideLayout3.xml><?xml version="1.0" encoding="utf-8"?>
+<p:sldLayout xmlns:a="http://schemas.openxmlformats.org/drawingml/2006/main" xmlns:r="http://schemas.openxmlformats.org/officeDocument/2006/relationships" xmlns:p="http://schemas.openxmlformats.org/presentationml/2006/main" type="secHead" preserve="1">
+  <p:cSld name="Section Header">
+    <p:spTree>
+      <p:nvGrpSpPr>
+        <p:cNvPr id="1" name=""/>
+        <p:cNvGrpSpPr/>
+        <p:nvPr/>
+      </p:nvGrpSpPr>
+      <p:grpSpPr>
+        <a:xfrm>
+          <a:off x="0" y="0"/>
+          <a:ext cx="0" cy="0"/>
+          <a:chOff x="0" y="0"/>
+          <a:chExt cx="0" cy="0"/>
+        </a:xfrm>
+      </p:grpSpPr>
+    </p:spTree>
+  </p:cSld>
+  <p:clrMapOvr>
+    <a:masterClrMapping/>
+  </p:clrMapOvr>
+</p:sldLayout>
+</file>
+
+<file path=ppt/slideLayouts/slideLayout4.xml><?xml version="1.0" encoding="utf-8"?>
+<p:sldLayout xmlns:a="http://schemas.openxmlformats.org/drawingml/2006/main" xmlns:r="http://schemas.openxmlformats.org/officeDocument/2006/relationships" xmlns:p="http://schemas.openxmlformats.org/presentationml/2006/main" type="twoObj" preserve="1">
+  <p:cSld name="Two Content">
+    <p:spTree>
+      <p:nvGrpSpPr>
+        <p:cNvPr id="1" name=""/>
+        <p:cNvGrpSpPr/>
+        <p:nvPr/>
+      </p:nvGrpSpPr>
+      <p:grpSpPr>
+        <a:xfrm>
+          <a:off x="0" y="0"/>
+          <a:ext cx="0" cy="0"/>
+          <a:chOff x="0" y="0"/>
+          <a:chExt cx="0" cy="0"/>
+        </a:xfrm>
+      </p:grpSpPr>
+    </p:spTree>
+  </p:cSld>
+  <p:clrMapOvr>
+    <a:masterClrMapping/>
+  </p:clrMapOvr>
+</p:sldLayout>
+</file>
+
+<file path=ppt/slideLayouts/slideLayout5.xml><?xml version="1.0" encoding="utf-8"?>
+<p:sldLayout xmlns:a="http://schemas.openxmlformats.org/drawingml/2006/main" xmlns:r="http://schemas.openxmlformats.org/officeDocument/2006/relationships" xmlns:p="http://schemas.openxmlformats.org/presentationml/2006/main" type="twoTxTwoObj" preserve="1">
+  <p:cSld name="Comparison">
+    <p:spTree>
+      <p:nvGrpSpPr>
+        <p:cNvPr id="1" name=""/>
+        <p:cNvGrpSpPr/>
+        <p:nvPr/>
+      </p:nvGrpSpPr>
+      <p:grpSpPr>
+        <a:xfrm>
+          <a:off x="0" y="0"/>
+          <a:ext cx="0" cy="0"/>
+          <a:chOff x="0" y="0"/>
+          <a:chExt cx="0" cy="0"/>
+        </a:xfrm>
+      </p:grpSpPr>
+    </p:spTree>
+  </p:cSld>
+  <p:clrMapOvr>
+    <a:masterClrMapping/>
+  </p:clrMapOvr>
+</p:sldLayout>
+</file>
+
+<file path=ppt/slideLayouts/slideLayout6.xml><?xml version="1.0" encoding="utf-8"?>
+<p:sldLayout xmlns:a="http://schemas.openxmlformats.org/drawingml/2006/main" xmlns:r="http://schemas.openxmlformats.org/officeDocument/2006/relationships" xmlns:p="http://schemas.openxmlformats.org/presentationml/2006/main" type="titleOnly" preserve="1">
+  <p:cSld name="Title Only">
+    <p:spTree>
+      <p:nvGrpSpPr>
+        <p:cNvPr id="1" name=""/>
+        <p:cNvGrpSpPr/>
+        <p:nvPr/>
+      </p:nvGrpSpPr>
+      <p:grpSpPr>
+        <a:xfrm>
+          <a:off x="0" y="0"/>
+          <a:ext cx="0" cy="0"/>
+          <a:chOff x="0" y="0"/>
+          <a:chExt cx="0" cy="0"/>
+        </a:xfrm>
+      </p:grpSpPr>
+    </p:spTree>
+  </p:cSld>
+  <p:clrMapOvr>
+    <a:masterClrMapping/>
+  </p:clrMapOvr>
+</p:sldLayout>
+</file>
+
+<file path=ppt/slideLayouts/slideLayout7.xml><?xml version="1.0" encoding="utf-8"?>
+<p:sldLayout xmlns:a="http://schemas.openxmlformats.org/drawingml/2006/main" xmlns:r="http://schemas.openxmlformats.org/officeDocument/2006/relationships" xmlns:p="http://schemas.openxmlformats.org/presentationml/2006/main" type="blank" preserve="1">
+  <p:cSld name="Blank">
+    <p:spTree>
+      <p:nvGrpSpPr>
+        <p:cNvPr id="1" name=""/>
+        <p:cNvGrpSpPr/>
+        <p:nvPr/>
+      </p:nvGrpSpPr>
+      <p:grpSpPr>
+        <a:xfrm>
+          <a:off x="0" y="0"/>
+          <a:ext cx="0" cy="0"/>
+          <a:chOff x="0" y="0"/>
+          <a:chExt cx="0" cy="0"/>
+        </a:xfrm>
+      </p:grpSpPr>
       <p:sp>
         <p:nvSpPr>
           <p:cNvPr id="90" name="LayoutLogo"/>
@@ -70,206 +270,6 @@
           </a:p>
         </p:txBody>
       </p:sp>
-    </p:spTree>
-  </p:cSld>
-  <p:clrMapOvr>
-    <a:masterClrMapping/>
-  </p:clrMapOvr>
-</p:sldLayout>
-</file>
-
-<file path=ppt/slideLayouts/slideLayout10.xml><?xml version="1.0" encoding="utf-8"?>
-<p:sldLayout xmlns:a="http://schemas.openxmlformats.org/drawingml/2006/main" xmlns:r="http://schemas.openxmlformats.org/officeDocument/2006/relationships" xmlns:p="http://schemas.openxmlformats.org/presentationml/2006/main" type="vertTx" preserve="1">
-  <p:cSld name="Title and Vertical Text">
-    <p:spTree>
-      <p:nvGrpSpPr>
-        <p:cNvPr id="1" name=""/>
-        <p:cNvGrpSpPr/>
-        <p:nvPr/>
-      </p:nvGrpSpPr>
-      <p:grpSpPr>
-        <a:xfrm>
-          <a:off x="0" y="0"/>
-          <a:ext cx="0" cy="0"/>
-          <a:chOff x="0" y="0"/>
-          <a:chExt cx="0" cy="0"/>
-        </a:xfrm>
-      </p:grpSpPr>
-    </p:spTree>
-  </p:cSld>
-  <p:clrMapOvr>
-    <a:masterClrMapping/>
-  </p:clrMapOvr>
-</p:sldLayout>
-</file>
-
-<file path=ppt/slideLayouts/slideLayout11.xml><?xml version="1.0" encoding="utf-8"?>
-<p:sldLayout xmlns:a="http://schemas.openxmlformats.org/drawingml/2006/main" xmlns:r="http://schemas.openxmlformats.org/officeDocument/2006/relationships" xmlns:p="http://schemas.openxmlformats.org/presentationml/2006/main" type="vertTitleAndTx" preserve="1">
-  <p:cSld name="Vertical Title and Text">
-    <p:spTree>
-      <p:nvGrpSpPr>
-        <p:cNvPr id="1" name=""/>
-        <p:cNvGrpSpPr/>
-        <p:nvPr/>
-      </p:nvGrpSpPr>
-      <p:grpSpPr>
-        <a:xfrm>
-          <a:off x="0" y="0"/>
-          <a:ext cx="0" cy="0"/>
-          <a:chOff x="0" y="0"/>
-          <a:chExt cx="0" cy="0"/>
-        </a:xfrm>
-      </p:grpSpPr>
-    </p:spTree>
-  </p:cSld>
-  <p:clrMapOvr>
-    <a:masterClrMapping/>
-  </p:clrMapOvr>
-</p:sldLayout>
-</file>
-
-<file path=ppt/slideLayouts/slideLayout2.xml><?xml version="1.0" encoding="utf-8"?>
-<p:sldLayout xmlns:a="http://schemas.openxmlformats.org/drawingml/2006/main" xmlns:r="http://schemas.openxmlformats.org/officeDocument/2006/relationships" xmlns:p="http://schemas.openxmlformats.org/presentationml/2006/main" type="obj" preserve="1">
-  <p:cSld name="Title and Content">
-    <p:spTree>
-      <p:nvGrpSpPr>
-        <p:cNvPr id="1" name=""/>
-        <p:cNvGrpSpPr/>
-        <p:nvPr/>
-      </p:nvGrpSpPr>
-      <p:grpSpPr>
-        <a:xfrm>
-          <a:off x="0" y="0"/>
-          <a:ext cx="0" cy="0"/>
-          <a:chOff x="0" y="0"/>
-          <a:chExt cx="0" cy="0"/>
-        </a:xfrm>
-      </p:grpSpPr>
-    </p:spTree>
-  </p:cSld>
-  <p:clrMapOvr>
-    <a:masterClrMapping/>
-  </p:clrMapOvr>
-</p:sldLayout>
-</file>
-
-<file path=ppt/slideLayouts/slideLayout3.xml><?xml version="1.0" encoding="utf-8"?>
-<p:sldLayout xmlns:a="http://schemas.openxmlformats.org/drawingml/2006/main" xmlns:r="http://schemas.openxmlformats.org/officeDocument/2006/relationships" xmlns:p="http://schemas.openxmlformats.org/presentationml/2006/main" type="secHead" preserve="1">
-  <p:cSld name="Section Header">
-    <p:spTree>
-      <p:nvGrpSpPr>
-        <p:cNvPr id="1" name=""/>
-        <p:cNvGrpSpPr/>
-        <p:nvPr/>
-      </p:nvGrpSpPr>
-      <p:grpSpPr>
-        <a:xfrm>
-          <a:off x="0" y="0"/>
-          <a:ext cx="0" cy="0"/>
-          <a:chOff x="0" y="0"/>
-          <a:chExt cx="0" cy="0"/>
-        </a:xfrm>
-      </p:grpSpPr>
-    </p:spTree>
-  </p:cSld>
-  <p:clrMapOvr>
-    <a:masterClrMapping/>
-  </p:clrMapOvr>
-</p:sldLayout>
-</file>
-
-<file path=ppt/slideLayouts/slideLayout4.xml><?xml version="1.0" encoding="utf-8"?>
-<p:sldLayout xmlns:a="http://schemas.openxmlformats.org/drawingml/2006/main" xmlns:r="http://schemas.openxmlformats.org/officeDocument/2006/relationships" xmlns:p="http://schemas.openxmlformats.org/presentationml/2006/main" type="twoObj" preserve="1">
-  <p:cSld name="Two Content">
-    <p:spTree>
-      <p:nvGrpSpPr>
-        <p:cNvPr id="1" name=""/>
-        <p:cNvGrpSpPr/>
-        <p:nvPr/>
-      </p:nvGrpSpPr>
-      <p:grpSpPr>
-        <a:xfrm>
-          <a:off x="0" y="0"/>
-          <a:ext cx="0" cy="0"/>
-          <a:chOff x="0" y="0"/>
-          <a:chExt cx="0" cy="0"/>
-        </a:xfrm>
-      </p:grpSpPr>
-    </p:spTree>
-  </p:cSld>
-  <p:clrMapOvr>
-    <a:masterClrMapping/>
-  </p:clrMapOvr>
-</p:sldLayout>
-</file>
-
-<file path=ppt/slideLayouts/slideLayout5.xml><?xml version="1.0" encoding="utf-8"?>
-<p:sldLayout xmlns:a="http://schemas.openxmlformats.org/drawingml/2006/main" xmlns:r="http://schemas.openxmlformats.org/officeDocument/2006/relationships" xmlns:p="http://schemas.openxmlformats.org/presentationml/2006/main" type="twoTxTwoObj" preserve="1">
-  <p:cSld name="Comparison">
-    <p:spTree>
-      <p:nvGrpSpPr>
-        <p:cNvPr id="1" name=""/>
-        <p:cNvGrpSpPr/>
-        <p:nvPr/>
-      </p:nvGrpSpPr>
-      <p:grpSpPr>
-        <a:xfrm>
-          <a:off x="0" y="0"/>
-          <a:ext cx="0" cy="0"/>
-          <a:chOff x="0" y="0"/>
-          <a:chExt cx="0" cy="0"/>
-        </a:xfrm>
-      </p:grpSpPr>
-    </p:spTree>
-  </p:cSld>
-  <p:clrMapOvr>
-    <a:masterClrMapping/>
-  </p:clrMapOvr>
-</p:sldLayout>
-</file>
-
-<file path=ppt/slideLayouts/slideLayout6.xml><?xml version="1.0" encoding="utf-8"?>
-<p:sldLayout xmlns:a="http://schemas.openxmlformats.org/drawingml/2006/main" xmlns:r="http://schemas.openxmlformats.org/officeDocument/2006/relationships" xmlns:p="http://schemas.openxmlformats.org/presentationml/2006/main" type="titleOnly" preserve="1">
-  <p:cSld name="Title Only">
-    <p:spTree>
-      <p:nvGrpSpPr>
-        <p:cNvPr id="1" name=""/>
-        <p:cNvGrpSpPr/>
-        <p:nvPr/>
-      </p:nvGrpSpPr>
-      <p:grpSpPr>
-        <a:xfrm>
-          <a:off x="0" y="0"/>
-          <a:ext cx="0" cy="0"/>
-          <a:chOff x="0" y="0"/>
-          <a:chExt cx="0" cy="0"/>
-        </a:xfrm>
-      </p:grpSpPr>
-    </p:spTree>
-  </p:cSld>
-  <p:clrMapOvr>
-    <a:masterClrMapping/>
-  </p:clrMapOvr>
-</p:sldLayout>
-</file>
-
-<file path=ppt/slideLayouts/slideLayout7.xml><?xml version="1.0" encoding="utf-8"?>
-<p:sldLayout xmlns:a="http://schemas.openxmlformats.org/drawingml/2006/main" xmlns:r="http://schemas.openxmlformats.org/officeDocument/2006/relationships" xmlns:p="http://schemas.openxmlformats.org/presentationml/2006/main" type="blank" preserve="1">
-  <p:cSld name="Blank">
-    <p:spTree>
-      <p:nvGrpSpPr>
-        <p:cNvPr id="1" name=""/>
-        <p:cNvGrpSpPr/>
-        <p:nvPr/>
-      </p:nvGrpSpPr>
-      <p:grpSpPr>
-        <a:xfrm>
-          <a:off x="0" y="0"/>
-          <a:ext cx="0" cy="0"/>
-          <a:chOff x="0" y="0"/>
-          <a:chExt cx="0" cy="0"/>
-        </a:xfrm>
-      </p:grpSpPr>
     </p:spTree>
   </p:cSld>
   <p:clrMapOvr>
@@ -473,7 +473,6 @@
           <a:bodyPr wrap="square"/>
           <a:lstStyle/>
           <a:p>
-            <a:pPr/>
             <a:r>
               <a:rPr lang="en-US" dirty="0">
                 <a:solidFill>
@@ -482,7 +481,6 @@
               </a:rPr>
               <a:t>SLIDE-SHAPE</a:t>
             </a:r>
-            <a:endParaRPr lang="en-US"/>
           </a:p>
         </p:txBody>
       </p:sp>
